--- a/slides/Module_09_FinOps.pptx
+++ b/slides/Module_09_FinOps.pptx
@@ -4142,8 +4142,8 @@
         </p:nvSpPr>
         <p:spPr>
           <a:xfrm>
-            <a:off x="365760" y="868680"/>
-            <a:ext cx="8412480" cy="420624"/>
+            <a:off x="365760" y="841248"/>
+            <a:ext cx="8412480" cy="384048"/>
           </a:xfrm>
           <a:prstGeom prst="rect">
             <a:avLst/>
@@ -4164,7 +4164,7 @@
                   <a:srgbClr val="1C3557"/>
                 </a:solidFill>
               </a:rPr>
-              <a:t>Build a Cost Model for Your Agent Workflow</a:t>
+              <a:t>Cost-Model Your Team’s Claude Code Usage</a:t>
             </a:r>
             <a:endParaRPr lang="en-US" sz="1900" dirty="0"/>
           </a:p>
@@ -4178,8 +4178,64 @@
         </p:nvSpPr>
         <p:spPr>
           <a:xfrm>
-            <a:off x="320040" y="1389888"/>
-            <a:ext cx="8503920" cy="658368"/>
+            <a:off x="320040" y="1280160"/>
+            <a:ext cx="8503920" cy="237744"/>
+          </a:xfrm>
+          <a:prstGeom prst="rect">
+            <a:avLst/>
+          </a:prstGeom>
+          <a:solidFill>
+            <a:srgbClr val="D4E4F0"/>
+          </a:solidFill>
+          <a:ln/>
+        </p:spPr>
+      </p:sp>
+      <p:sp>
+        <p:nvSpPr>
+          <p:cNvPr id="6" name="Text 4"/>
+          <p:cNvSpPr/>
+          <p:nvPr/>
+        </p:nvSpPr>
+        <p:spPr>
+          <a:xfrm>
+            <a:off x="411480" y="1280160"/>
+            <a:ext cx="8321040" cy="237744"/>
+          </a:xfrm>
+          <a:prstGeom prst="rect">
+            <a:avLst/>
+          </a:prstGeom>
+          <a:noFill/>
+          <a:ln/>
+        </p:spPr>
+        <p:txBody>
+          <a:bodyPr wrap="square" lIns="0" tIns="0" rIns="0" bIns="0" rtlCol="0" anchor="ctr"/>
+          <a:lstStyle/>
+          <a:p>
+            <a:pPr indent="0" marL="0">
+              <a:buNone/>
+            </a:pPr>
+            <a:r>
+              <a:rPr lang="en-US" sz="950" i="1" dirty="0">
+                <a:solidFill>
+                  <a:srgbClr val="1C3557"/>
+                </a:solidFill>
+              </a:rPr>
+              <a:t>Scope: focuses on the cost of using Claude Code and GitHub Copilot in your development workflow — not production agent costs (same principles apply once you ship production agents)</a:t>
+            </a:r>
+            <a:endParaRPr lang="en-US" sz="950" dirty="0"/>
+          </a:p>
+        </p:txBody>
+      </p:sp>
+      <p:sp>
+        <p:nvSpPr>
+          <p:cNvPr id="7" name="Shape 5"/>
+          <p:cNvSpPr/>
+          <p:nvPr/>
+        </p:nvSpPr>
+        <p:spPr>
+          <a:xfrm>
+            <a:off x="320040" y="1591056"/>
+            <a:ext cx="8503920" cy="640080"/>
           </a:xfrm>
           <a:prstGeom prst="rect">
             <a:avLst/>
@@ -4199,14 +4255,14 @@
       </p:sp>
       <p:sp>
         <p:nvSpPr>
-          <p:cNvPr id="6" name="Shape 4"/>
-          <p:cNvSpPr/>
-          <p:nvPr/>
-        </p:nvSpPr>
-        <p:spPr>
-          <a:xfrm>
-            <a:off x="320040" y="1389888"/>
-            <a:ext cx="475488" cy="658368"/>
+          <p:cNvPr id="8" name="Shape 6"/>
+          <p:cNvSpPr/>
+          <p:nvPr/>
+        </p:nvSpPr>
+        <p:spPr>
+          <a:xfrm>
+            <a:off x="320040" y="1591056"/>
+            <a:ext cx="475488" cy="640080"/>
           </a:xfrm>
           <a:prstGeom prst="rect">
             <a:avLst/>
@@ -4219,14 +4275,14 @@
       </p:sp>
       <p:sp>
         <p:nvSpPr>
-          <p:cNvPr id="7" name="Text 5"/>
-          <p:cNvSpPr/>
-          <p:nvPr/>
-        </p:nvSpPr>
-        <p:spPr>
-          <a:xfrm>
-            <a:off x="320040" y="1389888"/>
-            <a:ext cx="475488" cy="658368"/>
+          <p:cNvPr id="9" name="Text 7"/>
+          <p:cNvSpPr/>
+          <p:nvPr/>
+        </p:nvSpPr>
+        <p:spPr>
+          <a:xfrm>
+            <a:off x="320040" y="1591056"/>
+            <a:ext cx="475488" cy="640080"/>
           </a:xfrm>
           <a:prstGeom prst="rect">
             <a:avLst/>
@@ -4255,14 +4311,14 @@
       </p:sp>
       <p:sp>
         <p:nvSpPr>
-          <p:cNvPr id="8" name="Text 6"/>
-          <p:cNvSpPr/>
-          <p:nvPr/>
-        </p:nvSpPr>
-        <p:spPr>
-          <a:xfrm>
-            <a:off x="886968" y="1444752"/>
-            <a:ext cx="2103120" cy="256032"/>
+          <p:cNvPr id="10" name="Text 8"/>
+          <p:cNvSpPr/>
+          <p:nvPr/>
+        </p:nvSpPr>
+        <p:spPr>
+          <a:xfrm>
+            <a:off x="886968" y="1645920"/>
+            <a:ext cx="2103120" cy="237744"/>
           </a:xfrm>
           <a:prstGeom prst="rect">
             <a:avLst/>
@@ -4283,7 +4339,7 @@
                   <a:srgbClr val="4A7FA8"/>
                 </a:solidFill>
               </a:rPr>
-              <a:t>Estimate current spend</a:t>
+              <a:t>Estimate token costs</a:t>
             </a:r>
             <a:endParaRPr lang="en-US" sz="1250" dirty="0"/>
           </a:p>
@@ -4291,14 +4347,14 @@
       </p:sp>
       <p:sp>
         <p:nvSpPr>
-          <p:cNvPr id="9" name="Text 7"/>
-          <p:cNvSpPr/>
-          <p:nvPr/>
-        </p:nvSpPr>
-        <p:spPr>
-          <a:xfrm>
-            <a:off x="2990088" y="1444752"/>
-            <a:ext cx="731520" cy="256032"/>
+          <p:cNvPr id="11" name="Text 9"/>
+          <p:cNvSpPr/>
+          <p:nvPr/>
+        </p:nvSpPr>
+        <p:spPr>
+          <a:xfrm>
+            <a:off x="2990088" y="1645920"/>
+            <a:ext cx="731520" cy="237744"/>
           </a:xfrm>
           <a:prstGeom prst="rect">
             <a:avLst/>
@@ -4319,7 +4375,7 @@
                   <a:srgbClr val="7A90A8"/>
                 </a:solidFill>
               </a:rPr>
-              <a:t>(5 min)</a:t>
+              <a:t>(7 min)</a:t>
             </a:r>
             <a:endParaRPr lang="en-US" sz="1100" dirty="0"/>
           </a:p>
@@ -4327,13 +4383,13 @@
       </p:sp>
       <p:sp>
         <p:nvSpPr>
-          <p:cNvPr id="10" name="Text 8"/>
-          <p:cNvSpPr/>
-          <p:nvPr/>
-        </p:nvSpPr>
-        <p:spPr>
-          <a:xfrm>
-            <a:off x="886968" y="1737360"/>
+          <p:cNvPr id="12" name="Text 10"/>
+          <p:cNvSpPr/>
+          <p:nvPr/>
+        </p:nvSpPr>
+        <p:spPr>
+          <a:xfrm>
+            <a:off x="886968" y="1920240"/>
             <a:ext cx="7818120" cy="274320"/>
           </a:xfrm>
           <a:prstGeom prst="rect">
@@ -4355,7 +4411,7 @@
                   <a:srgbClr val="7A90A8"/>
                 </a:solidFill>
               </a:rPr>
-              <a:t>For your Module 2 agent workflow: estimate tokens per operation (input + output). Multiply by provider rate. Calculate cost per day at 100, 1,000, and 10,000 runs. What’s the surprise?</a:t>
+              <a:t>Pick one real Claude Code workflow your team uses. Estimate: LLM calls per run, context size, model tier. Use current Claude Sonnet pricing. What does one run cost? What does 20 developer runs/day cost?</a:t>
             </a:r>
             <a:endParaRPr lang="en-US" sz="1050" dirty="0"/>
           </a:p>
@@ -4363,14 +4419,14 @@
       </p:sp>
       <p:sp>
         <p:nvSpPr>
-          <p:cNvPr id="11" name="Shape 9"/>
-          <p:cNvSpPr/>
-          <p:nvPr/>
-        </p:nvSpPr>
-        <p:spPr>
-          <a:xfrm>
-            <a:off x="320040" y="2121408"/>
-            <a:ext cx="8503920" cy="658368"/>
+          <p:cNvPr id="13" name="Shape 11"/>
+          <p:cNvSpPr/>
+          <p:nvPr/>
+        </p:nvSpPr>
+        <p:spPr>
+          <a:xfrm>
+            <a:off x="320040" y="2304288"/>
+            <a:ext cx="8503920" cy="640080"/>
           </a:xfrm>
           <a:prstGeom prst="rect">
             <a:avLst/>
@@ -4390,14 +4446,14 @@
       </p:sp>
       <p:sp>
         <p:nvSpPr>
-          <p:cNvPr id="12" name="Shape 10"/>
-          <p:cNvSpPr/>
-          <p:nvPr/>
-        </p:nvSpPr>
-        <p:spPr>
-          <a:xfrm>
-            <a:off x="320040" y="2121408"/>
-            <a:ext cx="475488" cy="658368"/>
+          <p:cNvPr id="14" name="Shape 12"/>
+          <p:cNvSpPr/>
+          <p:nvPr/>
+        </p:nvSpPr>
+        <p:spPr>
+          <a:xfrm>
+            <a:off x="320040" y="2304288"/>
+            <a:ext cx="475488" cy="640080"/>
           </a:xfrm>
           <a:prstGeom prst="rect">
             <a:avLst/>
@@ -4410,14 +4466,14 @@
       </p:sp>
       <p:sp>
         <p:nvSpPr>
-          <p:cNvPr id="13" name="Text 11"/>
-          <p:cNvSpPr/>
-          <p:nvPr/>
-        </p:nvSpPr>
-        <p:spPr>
-          <a:xfrm>
-            <a:off x="320040" y="2121408"/>
-            <a:ext cx="475488" cy="658368"/>
+          <p:cNvPr id="15" name="Text 13"/>
+          <p:cNvSpPr/>
+          <p:nvPr/>
+        </p:nvSpPr>
+        <p:spPr>
+          <a:xfrm>
+            <a:off x="320040" y="2304288"/>
+            <a:ext cx="475488" cy="640080"/>
           </a:xfrm>
           <a:prstGeom prst="rect">
             <a:avLst/>
@@ -4446,14 +4502,14 @@
       </p:sp>
       <p:sp>
         <p:nvSpPr>
-          <p:cNvPr id="14" name="Text 12"/>
-          <p:cNvSpPr/>
-          <p:nvPr/>
-        </p:nvSpPr>
-        <p:spPr>
-          <a:xfrm>
-            <a:off x="886968" y="2176272"/>
-            <a:ext cx="2103120" cy="256032"/>
+          <p:cNvPr id="16" name="Text 14"/>
+          <p:cNvSpPr/>
+          <p:nvPr/>
+        </p:nvSpPr>
+        <p:spPr>
+          <a:xfrm>
+            <a:off x="886968" y="2359152"/>
+            <a:ext cx="2103120" cy="237744"/>
           </a:xfrm>
           <a:prstGeom prst="rect">
             <a:avLst/>
@@ -4474,7 +4530,7 @@
                   <a:srgbClr val="4A7FA8"/>
                 </a:solidFill>
               </a:rPr>
-              <a:t>Identify the biggest cost driver</a:t>
+              <a:t>Apply the five levers</a:t>
             </a:r>
             <a:endParaRPr lang="en-US" sz="1250" dirty="0"/>
           </a:p>
@@ -4482,14 +4538,14 @@
       </p:sp>
       <p:sp>
         <p:nvSpPr>
-          <p:cNvPr id="15" name="Text 13"/>
-          <p:cNvSpPr/>
-          <p:nvPr/>
-        </p:nvSpPr>
-        <p:spPr>
-          <a:xfrm>
-            <a:off x="2990088" y="2176272"/>
-            <a:ext cx="731520" cy="256032"/>
+          <p:cNvPr id="17" name="Text 15"/>
+          <p:cNvSpPr/>
+          <p:nvPr/>
+        </p:nvSpPr>
+        <p:spPr>
+          <a:xfrm>
+            <a:off x="2990088" y="2359152"/>
+            <a:ext cx="731520" cy="237744"/>
           </a:xfrm>
           <a:prstGeom prst="rect">
             <a:avLst/>
@@ -4510,7 +4566,7 @@
                   <a:srgbClr val="7A90A8"/>
                 </a:solidFill>
               </a:rPr>
-              <a:t>(5 min)</a:t>
+              <a:t>(6 min)</a:t>
             </a:r>
             <a:endParaRPr lang="en-US" sz="1100" dirty="0"/>
           </a:p>
@@ -4518,13 +4574,13 @@
       </p:sp>
       <p:sp>
         <p:nvSpPr>
-          <p:cNvPr id="16" name="Text 14"/>
-          <p:cNvSpPr/>
-          <p:nvPr/>
-        </p:nvSpPr>
-        <p:spPr>
-          <a:xfrm>
-            <a:off x="886968" y="2468880"/>
+          <p:cNvPr id="18" name="Text 16"/>
+          <p:cNvSpPr/>
+          <p:nvPr/>
+        </p:nvSpPr>
+        <p:spPr>
+          <a:xfrm>
+            <a:off x="886968" y="2633472"/>
             <a:ext cx="7818120" cy="274320"/>
           </a:xfrm>
           <a:prstGeom prst="rect">
@@ -4546,7 +4602,7 @@
                   <a:srgbClr val="7A90A8"/>
                 </a:solidFill>
               </a:rPr>
-              <a:t>Is it context window size? Output verbosity? Loop depth? Number of tool calls? Pinpoint the single biggest contributor to your estimated cost.</a:t>
+              <a:t>Which of the five optimisation levers apply to your coding agent workflow? For each applicable lever: estimate % savings and implementation effort (1–5). Which single change would you make first?</a:t>
             </a:r>
             <a:endParaRPr lang="en-US" sz="1050" dirty="0"/>
           </a:p>
@@ -4554,14 +4610,14 @@
       </p:sp>
       <p:sp>
         <p:nvSpPr>
-          <p:cNvPr id="17" name="Shape 15"/>
-          <p:cNvSpPr/>
-          <p:nvPr/>
-        </p:nvSpPr>
-        <p:spPr>
-          <a:xfrm>
-            <a:off x="320040" y="2852928"/>
-            <a:ext cx="8503920" cy="658368"/>
+          <p:cNvPr id="19" name="Shape 17"/>
+          <p:cNvSpPr/>
+          <p:nvPr/>
+        </p:nvSpPr>
+        <p:spPr>
+          <a:xfrm>
+            <a:off x="320040" y="3017520"/>
+            <a:ext cx="8503920" cy="640080"/>
           </a:xfrm>
           <a:prstGeom prst="rect">
             <a:avLst/>
@@ -4581,14 +4637,14 @@
       </p:sp>
       <p:sp>
         <p:nvSpPr>
-          <p:cNvPr id="18" name="Shape 16"/>
-          <p:cNvSpPr/>
-          <p:nvPr/>
-        </p:nvSpPr>
-        <p:spPr>
-          <a:xfrm>
-            <a:off x="320040" y="2852928"/>
-            <a:ext cx="475488" cy="658368"/>
+          <p:cNvPr id="20" name="Shape 18"/>
+          <p:cNvSpPr/>
+          <p:nvPr/>
+        </p:nvSpPr>
+        <p:spPr>
+          <a:xfrm>
+            <a:off x="320040" y="3017520"/>
+            <a:ext cx="475488" cy="640080"/>
           </a:xfrm>
           <a:prstGeom prst="rect">
             <a:avLst/>
@@ -4601,14 +4657,14 @@
       </p:sp>
       <p:sp>
         <p:nvSpPr>
-          <p:cNvPr id="19" name="Text 17"/>
-          <p:cNvSpPr/>
-          <p:nvPr/>
-        </p:nvSpPr>
-        <p:spPr>
-          <a:xfrm>
-            <a:off x="320040" y="2852928"/>
-            <a:ext cx="475488" cy="658368"/>
+          <p:cNvPr id="21" name="Text 19"/>
+          <p:cNvSpPr/>
+          <p:nvPr/>
+        </p:nvSpPr>
+        <p:spPr>
+          <a:xfrm>
+            <a:off x="320040" y="3017520"/>
+            <a:ext cx="475488" cy="640080"/>
           </a:xfrm>
           <a:prstGeom prst="rect">
             <a:avLst/>
@@ -4637,14 +4693,14 @@
       </p:sp>
       <p:sp>
         <p:nvSpPr>
-          <p:cNvPr id="20" name="Text 18"/>
-          <p:cNvSpPr/>
-          <p:nvPr/>
-        </p:nvSpPr>
-        <p:spPr>
-          <a:xfrm>
-            <a:off x="886968" y="2907792"/>
-            <a:ext cx="2103120" cy="256032"/>
+          <p:cNvPr id="22" name="Text 20"/>
+          <p:cNvSpPr/>
+          <p:nvPr/>
+        </p:nvSpPr>
+        <p:spPr>
+          <a:xfrm>
+            <a:off x="886968" y="3072384"/>
+            <a:ext cx="2103120" cy="237744"/>
           </a:xfrm>
           <a:prstGeom prst="rect">
             <a:avLst/>
@@ -4665,7 +4721,7 @@
                   <a:srgbClr val="4A7FA8"/>
                 </a:solidFill>
               </a:rPr>
-              <a:t>Apply three optimisation levers</a:t>
+              <a:t>Design your budget architecture</a:t>
             </a:r>
             <a:endParaRPr lang="en-US" sz="1250" dirty="0"/>
           </a:p>
@@ -4673,14 +4729,14 @@
       </p:sp>
       <p:sp>
         <p:nvSpPr>
-          <p:cNvPr id="21" name="Text 19"/>
-          <p:cNvSpPr/>
-          <p:nvPr/>
-        </p:nvSpPr>
-        <p:spPr>
-          <a:xfrm>
-            <a:off x="2990088" y="2907792"/>
-            <a:ext cx="731520" cy="256032"/>
+          <p:cNvPr id="23" name="Text 21"/>
+          <p:cNvSpPr/>
+          <p:nvPr/>
+        </p:nvSpPr>
+        <p:spPr>
+          <a:xfrm>
+            <a:off x="2990088" y="3072384"/>
+            <a:ext cx="731520" cy="237744"/>
           </a:xfrm>
           <a:prstGeom prst="rect">
             <a:avLst/>
@@ -4701,7 +4757,7 @@
                   <a:srgbClr val="7A90A8"/>
                 </a:solidFill>
               </a:rPr>
-              <a:t>(10 min)</a:t>
+              <a:t>(6 min)</a:t>
             </a:r>
             <a:endParaRPr lang="en-US" sz="1100" dirty="0"/>
           </a:p>
@@ -4709,13 +4765,13 @@
       </p:sp>
       <p:sp>
         <p:nvSpPr>
-          <p:cNvPr id="22" name="Text 20"/>
-          <p:cNvSpPr/>
-          <p:nvPr/>
-        </p:nvSpPr>
-        <p:spPr>
-          <a:xfrm>
-            <a:off x="886968" y="3200400"/>
+          <p:cNvPr id="24" name="Text 22"/>
+          <p:cNvSpPr/>
+          <p:nvPr/>
+        </p:nvSpPr>
+        <p:spPr>
+          <a:xfrm>
+            <a:off x="886968" y="3346704"/>
             <a:ext cx="7818120" cy="274320"/>
           </a:xfrm>
           <a:prstGeom prst="rect">
@@ -4737,7 +4793,7 @@
                   <a:srgbClr val="7A90A8"/>
                 </a:solidFill>
               </a:rPr>
-              <a:t>From the six levers: pick the three most applicable to your workflow. Estimate the savings from each. Which combination gets you to a sustainable unit cost?</a:t>
+              <a:t>Define cost limits at each level: org, team, per-developer session, per-task request. What triggers each alert? What is automated vs manual?</a:t>
             </a:r>
             <a:endParaRPr lang="en-US" sz="1050" dirty="0"/>
           </a:p>
@@ -4745,14 +4801,14 @@
       </p:sp>
       <p:sp>
         <p:nvSpPr>
-          <p:cNvPr id="23" name="Shape 21"/>
-          <p:cNvSpPr/>
-          <p:nvPr/>
-        </p:nvSpPr>
-        <p:spPr>
-          <a:xfrm>
-            <a:off x="320040" y="3584448"/>
-            <a:ext cx="8503920" cy="658368"/>
+          <p:cNvPr id="25" name="Shape 23"/>
+          <p:cNvSpPr/>
+          <p:nvPr/>
+        </p:nvSpPr>
+        <p:spPr>
+          <a:xfrm>
+            <a:off x="320040" y="3730752"/>
+            <a:ext cx="8503920" cy="640080"/>
           </a:xfrm>
           <a:prstGeom prst="rect">
             <a:avLst/>
@@ -4772,14 +4828,14 @@
       </p:sp>
       <p:sp>
         <p:nvSpPr>
-          <p:cNvPr id="24" name="Shape 22"/>
-          <p:cNvSpPr/>
-          <p:nvPr/>
-        </p:nvSpPr>
-        <p:spPr>
-          <a:xfrm>
-            <a:off x="320040" y="3584448"/>
-            <a:ext cx="475488" cy="658368"/>
+          <p:cNvPr id="26" name="Shape 24"/>
+          <p:cNvSpPr/>
+          <p:nvPr/>
+        </p:nvSpPr>
+        <p:spPr>
+          <a:xfrm>
+            <a:off x="320040" y="3730752"/>
+            <a:ext cx="475488" cy="640080"/>
           </a:xfrm>
           <a:prstGeom prst="rect">
             <a:avLst/>
@@ -4792,14 +4848,14 @@
       </p:sp>
       <p:sp>
         <p:nvSpPr>
-          <p:cNvPr id="25" name="Text 23"/>
-          <p:cNvSpPr/>
-          <p:nvPr/>
-        </p:nvSpPr>
-        <p:spPr>
-          <a:xfrm>
-            <a:off x="320040" y="3584448"/>
-            <a:ext cx="475488" cy="658368"/>
+          <p:cNvPr id="27" name="Text 25"/>
+          <p:cNvSpPr/>
+          <p:nvPr/>
+        </p:nvSpPr>
+        <p:spPr>
+          <a:xfrm>
+            <a:off x="320040" y="3730752"/>
+            <a:ext cx="475488" cy="640080"/>
           </a:xfrm>
           <a:prstGeom prst="rect">
             <a:avLst/>
@@ -4828,14 +4884,14 @@
       </p:sp>
       <p:sp>
         <p:nvSpPr>
-          <p:cNvPr id="26" name="Text 24"/>
-          <p:cNvSpPr/>
-          <p:nvPr/>
-        </p:nvSpPr>
-        <p:spPr>
-          <a:xfrm>
-            <a:off x="886968" y="3639312"/>
-            <a:ext cx="2103120" cy="256032"/>
+          <p:cNvPr id="28" name="Text 26"/>
+          <p:cNvSpPr/>
+          <p:nvPr/>
+        </p:nvSpPr>
+        <p:spPr>
+          <a:xfrm>
+            <a:off x="886968" y="3785616"/>
+            <a:ext cx="2103120" cy="237744"/>
           </a:xfrm>
           <a:prstGeom prst="rect">
             <a:avLst/>
@@ -4856,7 +4912,7 @@
                   <a:srgbClr val="4A7FA8"/>
                 </a:solidFill>
               </a:rPr>
-              <a:t>Define your FinOps metrics</a:t>
+              <a:t>Choose your tooling</a:t>
             </a:r>
             <a:endParaRPr lang="en-US" sz="1250" dirty="0"/>
           </a:p>
@@ -4864,14 +4920,14 @@
       </p:sp>
       <p:sp>
         <p:nvSpPr>
-          <p:cNvPr id="27" name="Text 25"/>
-          <p:cNvSpPr/>
-          <p:nvPr/>
-        </p:nvSpPr>
-        <p:spPr>
-          <a:xfrm>
-            <a:off x="2990088" y="3639312"/>
-            <a:ext cx="731520" cy="256032"/>
+          <p:cNvPr id="29" name="Text 27"/>
+          <p:cNvSpPr/>
+          <p:nvPr/>
+        </p:nvSpPr>
+        <p:spPr>
+          <a:xfrm>
+            <a:off x="2990088" y="3785616"/>
+            <a:ext cx="731520" cy="237744"/>
           </a:xfrm>
           <a:prstGeom prst="rect">
             <a:avLst/>
@@ -4892,7 +4948,7 @@
                   <a:srgbClr val="7A90A8"/>
                 </a:solidFill>
               </a:rPr>
-              <a:t>(5 min)</a:t>
+              <a:t>(4 min)</a:t>
             </a:r>
             <a:endParaRPr lang="en-US" sz="1100" dirty="0"/>
           </a:p>
@@ -4900,13 +4956,13 @@
       </p:sp>
       <p:sp>
         <p:nvSpPr>
-          <p:cNvPr id="28" name="Text 26"/>
-          <p:cNvSpPr/>
-          <p:nvPr/>
-        </p:nvSpPr>
-        <p:spPr>
-          <a:xfrm>
-            <a:off x="886968" y="3931920"/>
+          <p:cNvPr id="30" name="Text 28"/>
+          <p:cNvSpPr/>
+          <p:nvPr/>
+        </p:nvSpPr>
+        <p:spPr>
+          <a:xfrm>
+            <a:off x="886968" y="4059936"/>
             <a:ext cx="7818120" cy="274320"/>
           </a:xfrm>
           <a:prstGeom prst="rect">
@@ -4928,7 +4984,7 @@
                   <a:srgbClr val="7A90A8"/>
                 </a:solidFill>
               </a:rPr>
-              <a:t>Define cost-per-unit-of-work for your workflow. What does “one unit of work” mean? What’s your target cost per unit? What’s the maximum acceptable cost?</a:t>
+              <a:t>Langfuse, Vantage, Portkey, or native Anthropic usage dashboards? What is the one view your tech lead checks weekly?</a:t>
             </a:r>
             <a:endParaRPr lang="en-US" sz="1050" dirty="0"/>
           </a:p>
@@ -4936,14 +4992,14 @@
       </p:sp>
       <p:sp>
         <p:nvSpPr>
-          <p:cNvPr id="29" name="Shape 27"/>
-          <p:cNvSpPr/>
-          <p:nvPr/>
-        </p:nvSpPr>
-        <p:spPr>
-          <a:xfrm>
-            <a:off x="320040" y="4315968"/>
-            <a:ext cx="8503920" cy="658368"/>
+          <p:cNvPr id="31" name="Shape 29"/>
+          <p:cNvSpPr/>
+          <p:nvPr/>
+        </p:nvSpPr>
+        <p:spPr>
+          <a:xfrm>
+            <a:off x="320040" y="4443984"/>
+            <a:ext cx="8503920" cy="640080"/>
           </a:xfrm>
           <a:prstGeom prst="rect">
             <a:avLst/>
@@ -4963,14 +5019,14 @@
       </p:sp>
       <p:sp>
         <p:nvSpPr>
-          <p:cNvPr id="30" name="Shape 28"/>
-          <p:cNvSpPr/>
-          <p:nvPr/>
-        </p:nvSpPr>
-        <p:spPr>
-          <a:xfrm>
-            <a:off x="320040" y="4315968"/>
-            <a:ext cx="475488" cy="658368"/>
+          <p:cNvPr id="32" name="Shape 30"/>
+          <p:cNvSpPr/>
+          <p:nvPr/>
+        </p:nvSpPr>
+        <p:spPr>
+          <a:xfrm>
+            <a:off x="320040" y="4443984"/>
+            <a:ext cx="475488" cy="640080"/>
           </a:xfrm>
           <a:prstGeom prst="rect">
             <a:avLst/>
@@ -4983,14 +5039,14 @@
       </p:sp>
       <p:sp>
         <p:nvSpPr>
-          <p:cNvPr id="31" name="Text 29"/>
-          <p:cNvSpPr/>
-          <p:nvPr/>
-        </p:nvSpPr>
-        <p:spPr>
-          <a:xfrm>
-            <a:off x="320040" y="4315968"/>
-            <a:ext cx="475488" cy="658368"/>
+          <p:cNvPr id="33" name="Text 31"/>
+          <p:cNvSpPr/>
+          <p:nvPr/>
+        </p:nvSpPr>
+        <p:spPr>
+          <a:xfrm>
+            <a:off x="320040" y="4443984"/>
+            <a:ext cx="475488" cy="640080"/>
           </a:xfrm>
           <a:prstGeom prst="rect">
             <a:avLst/>
@@ -5019,14 +5075,14 @@
       </p:sp>
       <p:sp>
         <p:nvSpPr>
-          <p:cNvPr id="32" name="Text 30"/>
-          <p:cNvSpPr/>
-          <p:nvPr/>
-        </p:nvSpPr>
-        <p:spPr>
-          <a:xfrm>
-            <a:off x="886968" y="4370832"/>
-            <a:ext cx="2103120" cy="256032"/>
+          <p:cNvPr id="34" name="Text 32"/>
+          <p:cNvSpPr/>
+          <p:nvPr/>
+        </p:nvSpPr>
+        <p:spPr>
+          <a:xfrm>
+            <a:off x="886968" y="4498848"/>
+            <a:ext cx="2103120" cy="237744"/>
           </a:xfrm>
           <a:prstGeom prst="rect">
             <a:avLst/>
@@ -5047,7 +5103,7 @@
                   <a:srgbClr val="4A7FA8"/>
                 </a:solidFill>
               </a:rPr>
-              <a:t>Design a budget guardrail</a:t>
+              <a:t>Share your $/day estimate</a:t>
             </a:r>
             <a:endParaRPr lang="en-US" sz="1250" dirty="0"/>
           </a:p>
@@ -5055,14 +5111,14 @@
       </p:sp>
       <p:sp>
         <p:nvSpPr>
-          <p:cNvPr id="33" name="Text 31"/>
-          <p:cNvSpPr/>
-          <p:nvPr/>
-        </p:nvSpPr>
-        <p:spPr>
-          <a:xfrm>
-            <a:off x="2990088" y="4370832"/>
-            <a:ext cx="731520" cy="256032"/>
+          <p:cNvPr id="35" name="Text 33"/>
+          <p:cNvSpPr/>
+          <p:nvPr/>
+        </p:nvSpPr>
+        <p:spPr>
+          <a:xfrm>
+            <a:off x="2990088" y="4498848"/>
+            <a:ext cx="731520" cy="237744"/>
           </a:xfrm>
           <a:prstGeom prst="rect">
             <a:avLst/>
@@ -5083,7 +5139,7 @@
                   <a:srgbClr val="7A90A8"/>
                 </a:solidFill>
               </a:rPr>
-              <a:t>(5 min)</a:t>
+              <a:t>(2 min)</a:t>
             </a:r>
             <a:endParaRPr lang="en-US" sz="1100" dirty="0"/>
           </a:p>
@@ -5091,13 +5147,13 @@
       </p:sp>
       <p:sp>
         <p:nvSpPr>
-          <p:cNvPr id="34" name="Text 32"/>
-          <p:cNvSpPr/>
-          <p:nvPr/>
-        </p:nvSpPr>
-        <p:spPr>
-          <a:xfrm>
-            <a:off x="886968" y="4663440"/>
+          <p:cNvPr id="36" name="Text 34"/>
+          <p:cNvSpPr/>
+          <p:nvPr/>
+        </p:nvSpPr>
+        <p:spPr>
+          <a:xfrm>
+            <a:off x="886968" y="4773168"/>
             <a:ext cx="7818120" cy="274320"/>
           </a:xfrm>
           <a:prstGeom prst="rect">
@@ -5119,7 +5175,7 @@
                   <a:srgbClr val="7A90A8"/>
                 </a:solidFill>
               </a:rPr>
-              <a:t>Define three threshold levels: Yellow (50% budget: alert), Orange (80%: throttle), Red (100%: stop). Who gets notified at each? What’s the auto-response?</a:t>
+              <a:t>What surprised you? Where is the biggest cost risk in your current usage patterns? What habit would you change today?</a:t>
             </a:r>
             <a:endParaRPr lang="en-US" sz="1050" dirty="0"/>
           </a:p>

--- a/slides/Module_09_FinOps.pptx
+++ b/slides/Module_09_FinOps.pptx
@@ -10889,7 +10889,7 @@
                   <a:srgbClr val="1E2D3D"/>
                 </a:solidFill>
               </a:rPr>
-              <a:t>• Chargeback to cost centres by consumption</a:t>
+              <a:t>• Chargeback to cost centers by consumption</a:t>
             </a:r>
             <a:endParaRPr lang="en-US" sz="1100" dirty="0"/>
           </a:p>
